--- a/abbildungen/kap3/Exemplarische_Top-Down-Vorgaben_und_Abstimmungen.pptx
+++ b/abbildungen/kap3/Exemplarische_Top-Down-Vorgaben_und_Abstimmungen.pptx
@@ -7,7 +7,7 @@
   <p:sldIdLst>
     <p:sldId id="256" r:id="rId7"/>
   </p:sldIdLst>
-  <p:sldSz cx="3960000" cy="3693095" type="screen4x3"/>
+  <p:sldSz cx="3960000" cy="3910977" type="screen4x3"/>
   <p:notesSz cx="6858000" cy="9144000"/>
   <p:defaultTextStyle>
     <a:defPPr>
@@ -3097,7 +3097,7 @@
         <p:spPr>
           <a:xfrm>
             <a:off x="2724" y="2724"/>
-            <a:ext cx="3954553" cy="3687648"/>
+            <a:ext cx="3954553" cy="3905530"/>
           </a:xfrm>
           <a:prstGeom prst="rect">
             <a:avLst/>
@@ -3119,45 +3119,37 @@
           </a:p>
         </p:txBody>
       </p:sp>
-      <p:sp>
-        <p:nvSpPr>
-          <p:cNvPr id="3" name="kopf"/>
-          <p:cNvSpPr/>
-          <p:nvPr/>
-        </p:nvSpPr>
-        <p:spPr>
-          <a:xfrm>
-            <a:off x="5447" y="5447"/>
-            <a:ext cx="3949106" cy="163411"/>
-          </a:xfrm>
-          <a:prstGeom prst="rect">
-            <a:avLst/>
-          </a:prstGeom>
-          <a:solidFill>
-            <a:srgbClr val="3A3F44"/>
-          </a:solidFill>
-          <a:ln>
-            <a:noFill/>
+      <p:cxnSp>
+        <p:nvCxnSpPr>
+          <p:cNvPr id="3" name="Linie"/>
+          <p:cNvCxnSpPr/>
+          <p:nvPr/>
+        </p:nvCxnSpPr>
+        <p:spPr>
+          <a:xfrm>
+            <a:off x="87153" y="384017"/>
+            <a:ext cx="3785694" cy="0"/>
+          </a:xfrm>
+          <a:prstGeom prst="line">
+            <a:avLst/>
+          </a:prstGeom>
+          <a:ln w="5447">
+            <a:solidFill>
+              <a:srgbClr val="D9D9D9"/>
+            </a:solidFill>
           </a:ln>
         </p:spPr>
-        <p:txBody>
-          <a:bodyPr rtlCol="0" anchor="ctr"/>
-          <a:lstStyle/>
-          <a:p>
-            <a:pPr algn="ctr"/>
-          </a:p>
-        </p:txBody>
-      </p:sp>
-      <p:sp>
-        <p:nvSpPr>
-          <p:cNvPr id="4" name="Text SPAN"/>
+      </p:cxnSp>
+      <p:sp>
+        <p:nvSpPr>
+          <p:cNvPr id="4" name="Text kopf-titel"/>
           <p:cNvSpPr txBox="1"/>
           <p:nvPr/>
         </p:nvSpPr>
         <p:spPr>
           <a:xfrm>
-            <a:off x="87153" y="33554"/>
-            <a:ext cx="823440" cy="92600"/>
+            <a:off x="87153" y="66236"/>
+            <a:ext cx="1119963" cy="136176"/>
           </a:xfrm>
           <a:prstGeom prst="rect">
             <a:avLst/>
@@ -3172,9 +3164,9 @@
           <a:p>
             <a:pPr algn="l"/>
             <a:r>
-              <a:rPr sz="686" b="1" i="0" u="none" lang="de-DE">
-                <a:solidFill>
-                  <a:srgbClr val="FFFFFF"/>
+              <a:rPr sz="944" b="1" i="0" u="none" lang="de-DE">
+                <a:solidFill>
+                  <a:srgbClr val="1A1A1A"/>
                 </a:solidFill>
                 <a:latin typeface="Arial"/>
               </a:rPr>
@@ -3185,14 +3177,14 @@
       </p:sp>
       <p:sp>
         <p:nvSpPr>
-          <p:cNvPr id="5" name="Text kopf-info"/>
+          <p:cNvPr id="5" name="Text kopf-unter"/>
           <p:cNvSpPr txBox="1"/>
           <p:nvPr/>
         </p:nvSpPr>
         <p:spPr>
           <a:xfrm>
-            <a:off x="3361421" y="39001"/>
-            <a:ext cx="544108" cy="87153"/>
+            <a:off x="87153" y="229647"/>
+            <a:ext cx="1550620" cy="87153"/>
           </a:xfrm>
           <a:prstGeom prst="rect">
             <a:avLst/>
@@ -3209,7 +3201,42 @@
             <a:r>
               <a:rPr sz="600" b="0" i="0" u="none" lang="de-DE">
                 <a:solidFill>
-                  <a:srgbClr val="FFFFFF"/>
+                  <a:srgbClr val="4D4D4D"/>
+                </a:solidFill>
+                <a:latin typeface="Arial"/>
+              </a:rPr>
+              <a:t>Budget 2028 – Vorgabe · Stand 30.06.2027 ·</a:t>
+            </a:r>
+          </a:p>
+        </p:txBody>
+      </p:sp>
+      <p:sp>
+        <p:nvSpPr>
+          <p:cNvPr id="6" name="Text kopf-info"/>
+          <p:cNvSpPr txBox="1"/>
+          <p:nvPr/>
+        </p:nvSpPr>
+        <p:spPr>
+          <a:xfrm>
+            <a:off x="1626283" y="229647"/>
+            <a:ext cx="544108" cy="87153"/>
+          </a:xfrm>
+          <a:prstGeom prst="rect">
+            <a:avLst/>
+          </a:prstGeom>
+          <a:noFill/>
+        </p:spPr>
+        <p:txBody>
+          <a:bodyPr wrap="none" lIns="0" rIns="0" tIns="0" bIns="0" anchor="t">
+            <a:noAutofit/>
+          </a:bodyPr>
+          <a:lstStyle/>
+          <a:p>
+            <a:pPr algn="l"/>
+            <a:r>
+              <a:rPr sz="600" b="0" i="0" u="none" lang="de-DE">
+                <a:solidFill>
+                  <a:srgbClr val="4D4D4D"/>
                 </a:solidFill>
                 <a:latin typeface="Arial"/>
               </a:rPr>
@@ -3220,13 +3247,13 @@
       </p:sp>
       <p:sp>
         <p:nvSpPr>
-          <p:cNvPr id="6" name="band-ges"/>
+          <p:cNvPr id="7" name="band-ges"/>
           <p:cNvSpPr/>
           <p:nvPr/>
         </p:nvSpPr>
         <p:spPr>
           <a:xfrm>
-            <a:off x="87153" y="245117"/>
+            <a:off x="87153" y="462999"/>
             <a:ext cx="3785695" cy="141623"/>
           </a:xfrm>
           <a:prstGeom prst="rect">
@@ -3249,13 +3276,13 @@
       </p:sp>
       <p:sp>
         <p:nvSpPr>
-          <p:cNvPr id="7" name="Text band-ges"/>
+          <p:cNvPr id="8" name="Text band-ges"/>
           <p:cNvSpPr txBox="1"/>
           <p:nvPr/>
         </p:nvSpPr>
         <p:spPr>
           <a:xfrm>
-            <a:off x="130729" y="267777"/>
+            <a:off x="130729" y="485658"/>
             <a:ext cx="1721265" cy="87153"/>
           </a:xfrm>
           <a:prstGeom prst="rect">
@@ -3284,13 +3311,13 @@
       </p:sp>
       <p:sp>
         <p:nvSpPr>
-          <p:cNvPr id="8" name="Text mk-label"/>
+          <p:cNvPr id="9" name="Text mk-label"/>
           <p:cNvSpPr txBox="1"/>
           <p:nvPr/>
         </p:nvSpPr>
         <p:spPr>
           <a:xfrm>
-            <a:off x="87153" y="463870"/>
+            <a:off x="87153" y="681752"/>
             <a:ext cx="295587" cy="87153"/>
           </a:xfrm>
           <a:prstGeom prst="rect">
@@ -3319,13 +3346,13 @@
       </p:sp>
       <p:sp>
         <p:nvSpPr>
-          <p:cNvPr id="9" name="f-periode"/>
+          <p:cNvPr id="10" name="f-periode"/>
           <p:cNvSpPr/>
           <p:nvPr/>
         </p:nvSpPr>
         <p:spPr>
           <a:xfrm>
-            <a:off x="1004979" y="443934"/>
+            <a:off x="1004979" y="661816"/>
             <a:ext cx="1040385" cy="136176"/>
           </a:xfrm>
           <a:prstGeom prst="roundRect">
@@ -3352,13 +3379,13 @@
       </p:sp>
       <p:sp>
         <p:nvSpPr>
-          <p:cNvPr id="10" name="Text SPAN"/>
+          <p:cNvPr id="11" name="Text SPAN"/>
           <p:cNvSpPr txBox="1"/>
           <p:nvPr/>
         </p:nvSpPr>
         <p:spPr>
           <a:xfrm>
-            <a:off x="1045832" y="463870"/>
+            <a:off x="1045832" y="681752"/>
             <a:ext cx="834164" cy="87153"/>
           </a:xfrm>
           <a:prstGeom prst="rect">
@@ -3380,20 +3407,20 @@
                 </a:solidFill>
                 <a:latin typeface="Arial"/>
               </a:rPr>
-              <a:t>Budget 2027 – Vorgabe</a:t>
-            </a:r>
-          </a:p>
-        </p:txBody>
-      </p:sp>
-      <p:sp>
-        <p:nvSpPr>
-          <p:cNvPr id="11" name="Form"/>
+              <a:t>Budget 2028 – Vorgabe</a:t>
+            </a:r>
+          </a:p>
+        </p:txBody>
+      </p:sp>
+      <p:sp>
+        <p:nvSpPr>
+          <p:cNvPr id="12" name="Form"/>
           <p:cNvSpPr/>
           <p:nvPr/>
         </p:nvSpPr>
         <p:spPr>
           <a:xfrm>
-            <a:off x="1950041" y="501128"/>
+            <a:off x="1950041" y="719010"/>
             <a:ext cx="43577" cy="27235"/>
           </a:xfrm>
           <a:custGeom>
@@ -3434,13 +3461,13 @@
       </p:sp>
       <p:sp>
         <p:nvSpPr>
-          <p:cNvPr id="12" name="Text mk-label"/>
+          <p:cNvPr id="13" name="Text mk-label"/>
           <p:cNvSpPr txBox="1"/>
           <p:nvPr/>
         </p:nvSpPr>
         <p:spPr>
           <a:xfrm>
-            <a:off x="87153" y="627281"/>
+            <a:off x="87153" y="845163"/>
             <a:ext cx="311077" cy="87153"/>
           </a:xfrm>
           <a:prstGeom prst="rect">
@@ -3469,13 +3496,13 @@
       </p:sp>
       <p:sp>
         <p:nvSpPr>
-          <p:cNvPr id="13" name="f-variante"/>
+          <p:cNvPr id="14" name="f-variante"/>
           <p:cNvSpPr/>
           <p:nvPr/>
         </p:nvSpPr>
         <p:spPr>
           <a:xfrm>
-            <a:off x="1004979" y="607345"/>
+            <a:off x="1004979" y="825227"/>
             <a:ext cx="1040385" cy="136176"/>
           </a:xfrm>
           <a:prstGeom prst="roundRect">
@@ -3502,13 +3529,13 @@
       </p:sp>
       <p:sp>
         <p:nvSpPr>
-          <p:cNvPr id="14" name="Text SPAN"/>
+          <p:cNvPr id="15" name="Text SPAN"/>
           <p:cNvSpPr txBox="1"/>
           <p:nvPr/>
         </p:nvSpPr>
         <p:spPr>
           <a:xfrm>
-            <a:off x="1045832" y="627281"/>
+            <a:off x="1045832" y="845163"/>
             <a:ext cx="342227" cy="87153"/>
           </a:xfrm>
           <a:prstGeom prst="rect">
@@ -3537,13 +3564,13 @@
       </p:sp>
       <p:sp>
         <p:nvSpPr>
-          <p:cNvPr id="15" name="Form"/>
+          <p:cNvPr id="16" name="Form"/>
           <p:cNvSpPr/>
           <p:nvPr/>
         </p:nvSpPr>
         <p:spPr>
           <a:xfrm>
-            <a:off x="1950041" y="664539"/>
+            <a:off x="1950041" y="882421"/>
             <a:ext cx="43577" cy="27235"/>
           </a:xfrm>
           <a:custGeom>
@@ -3584,13 +3611,13 @@
       </p:sp>
       <p:sp>
         <p:nvSpPr>
-          <p:cNvPr id="16" name="Text mk-label"/>
+          <p:cNvPr id="17" name="Text mk-label"/>
           <p:cNvSpPr txBox="1"/>
           <p:nvPr/>
         </p:nvSpPr>
         <p:spPr>
           <a:xfrm>
-            <a:off x="87153" y="790693"/>
+            <a:off x="87153" y="1008574"/>
             <a:ext cx="354824" cy="87153"/>
           </a:xfrm>
           <a:prstGeom prst="rect">
@@ -3619,13 +3646,13 @@
       </p:sp>
       <p:sp>
         <p:nvSpPr>
-          <p:cNvPr id="17" name="f-zielgroesse"/>
+          <p:cNvPr id="18" name="f-zielgroesse"/>
           <p:cNvSpPr/>
           <p:nvPr/>
         </p:nvSpPr>
         <p:spPr>
           <a:xfrm>
-            <a:off x="1004979" y="770757"/>
+            <a:off x="1004979" y="988638"/>
             <a:ext cx="1040385" cy="136176"/>
           </a:xfrm>
           <a:prstGeom prst="roundRect">
@@ -3652,13 +3679,13 @@
       </p:sp>
       <p:sp>
         <p:nvSpPr>
-          <p:cNvPr id="18" name="Text SPAN"/>
+          <p:cNvPr id="19" name="Text SPAN"/>
           <p:cNvSpPr txBox="1"/>
           <p:nvPr/>
         </p:nvSpPr>
         <p:spPr>
           <a:xfrm>
-            <a:off x="1045832" y="790693"/>
+            <a:off x="1045832" y="1008574"/>
             <a:ext cx="291161" cy="87153"/>
           </a:xfrm>
           <a:prstGeom prst="rect">
@@ -3687,14 +3714,14 @@
       </p:sp>
       <p:sp>
         <p:nvSpPr>
-          <p:cNvPr id="19" name="Form"/>
+          <p:cNvPr id="20" name="Form"/>
           <p:cNvSpPr/>
           <p:nvPr/>
         </p:nvSpPr>
         <p:spPr>
           <a:xfrm>
-            <a:off x="1950041" y="827950"/>
-            <a:ext cx="43577" cy="27236"/>
+            <a:off x="1950041" y="1045832"/>
+            <a:ext cx="43577" cy="27235"/>
           </a:xfrm>
           <a:custGeom>
             <a:avLst/>
@@ -3703,7 +3730,7 @@
             <a:cxnLst/>
             <a:rect l="l" t="t" r="r" b="b"/>
             <a:pathLst>
-              <a:path w="43577" h="27236">
+              <a:path w="43577" h="27235">
                 <a:moveTo>
                   <a:pt x="0" y="0"/>
                 </a:moveTo>
@@ -3711,7 +3738,7 @@
                   <a:pt x="43577" y="0"/>
                 </a:lnTo>
                 <a:lnTo>
-                  <a:pt x="21788" y="27236"/>
+                  <a:pt x="21788" y="27235"/>
                 </a:lnTo>
                 <a:close/>
               </a:path>
@@ -3734,13 +3761,13 @@
       </p:sp>
       <p:sp>
         <p:nvSpPr>
-          <p:cNvPr id="20" name="Text l-vorgabe"/>
+          <p:cNvPr id="21" name="Text l-vorgabe"/>
           <p:cNvSpPr txBox="1"/>
           <p:nvPr/>
         </p:nvSpPr>
         <p:spPr>
           <a:xfrm>
-            <a:off x="87153" y="954104"/>
+            <a:off x="87153" y="1171986"/>
             <a:ext cx="316865" cy="87153"/>
           </a:xfrm>
           <a:prstGeom prst="rect">
@@ -3769,13 +3796,13 @@
       </p:sp>
       <p:sp>
         <p:nvSpPr>
-          <p:cNvPr id="21" name="f-vorgabe"/>
+          <p:cNvPr id="22" name="f-vorgabe"/>
           <p:cNvSpPr/>
           <p:nvPr/>
         </p:nvSpPr>
         <p:spPr>
           <a:xfrm>
-            <a:off x="1004979" y="934168"/>
+            <a:off x="1004979" y="1152050"/>
             <a:ext cx="1040385" cy="136176"/>
           </a:xfrm>
           <a:prstGeom prst="roundRect">
@@ -3802,13 +3829,13 @@
       </p:sp>
       <p:sp>
         <p:nvSpPr>
-          <p:cNvPr id="22" name="Text f-vorgabe"/>
+          <p:cNvPr id="23" name="Text f-vorgabe"/>
           <p:cNvSpPr txBox="1"/>
           <p:nvPr/>
         </p:nvSpPr>
         <p:spPr>
           <a:xfrm>
-            <a:off x="1786630" y="954104"/>
+            <a:off x="1786630" y="1171986"/>
             <a:ext cx="217882" cy="87153"/>
           </a:xfrm>
           <a:prstGeom prst="rect">
@@ -3837,13 +3864,13 @@
       </p:sp>
       <p:sp>
         <p:nvSpPr>
-          <p:cNvPr id="23" name="Text l-differenz"/>
+          <p:cNvPr id="24" name="Text l-differenz"/>
           <p:cNvSpPr txBox="1"/>
           <p:nvPr/>
         </p:nvSpPr>
         <p:spPr>
           <a:xfrm>
-            <a:off x="87153" y="1117515"/>
+            <a:off x="87153" y="1335397"/>
             <a:ext cx="768884" cy="87153"/>
           </a:xfrm>
           <a:prstGeom prst="rect">
@@ -3872,13 +3899,13 @@
       </p:sp>
       <p:sp>
         <p:nvSpPr>
-          <p:cNvPr id="24" name="f-differenz"/>
+          <p:cNvPr id="25" name="f-differenz"/>
           <p:cNvSpPr/>
           <p:nvPr/>
         </p:nvSpPr>
         <p:spPr>
           <a:xfrm>
-            <a:off x="1004979" y="1097579"/>
+            <a:off x="1004979" y="1315461"/>
             <a:ext cx="1040385" cy="136176"/>
           </a:xfrm>
           <a:prstGeom prst="roundRect">
@@ -3905,13 +3932,13 @@
       </p:sp>
       <p:sp>
         <p:nvSpPr>
-          <p:cNvPr id="25" name="Text f-differenz"/>
+          <p:cNvPr id="26" name="Text f-differenz"/>
           <p:cNvSpPr txBox="1"/>
           <p:nvPr/>
         </p:nvSpPr>
         <p:spPr>
           <a:xfrm>
-            <a:off x="1821270" y="1117515"/>
+            <a:off x="1821270" y="1335397"/>
             <a:ext cx="183242" cy="87153"/>
           </a:xfrm>
           <a:prstGeom prst="rect">
@@ -3940,13 +3967,13 @@
       </p:sp>
       <p:sp>
         <p:nvSpPr>
-          <p:cNvPr id="26" name="Text mk-label"/>
+          <p:cNvPr id="27" name="Text mk-label"/>
           <p:cNvSpPr txBox="1"/>
           <p:nvPr/>
         </p:nvSpPr>
         <p:spPr>
           <a:xfrm>
-            <a:off x="87153" y="1280927"/>
+            <a:off x="87153" y="1498808"/>
             <a:ext cx="248947" cy="87153"/>
           </a:xfrm>
           <a:prstGeom prst="rect">
@@ -3975,13 +4002,13 @@
       </p:sp>
       <p:sp>
         <p:nvSpPr>
-          <p:cNvPr id="27" name="f-status"/>
+          <p:cNvPr id="28" name="f-status"/>
           <p:cNvSpPr/>
           <p:nvPr/>
         </p:nvSpPr>
         <p:spPr>
           <a:xfrm>
-            <a:off x="1004979" y="1260990"/>
+            <a:off x="1004979" y="1478872"/>
             <a:ext cx="1040385" cy="136176"/>
           </a:xfrm>
           <a:prstGeom prst="roundRect">
@@ -4008,13 +4035,13 @@
       </p:sp>
       <p:sp>
         <p:nvSpPr>
-          <p:cNvPr id="28" name="Text f-status"/>
+          <p:cNvPr id="29" name="Text f-status"/>
           <p:cNvSpPr txBox="1"/>
           <p:nvPr/>
         </p:nvSpPr>
         <p:spPr>
           <a:xfrm>
-            <a:off x="1045832" y="1280927"/>
+            <a:off x="1045832" y="1498808"/>
             <a:ext cx="855015" cy="87153"/>
           </a:xfrm>
           <a:prstGeom prst="rect">
@@ -4043,13 +4070,13 @@
       </p:sp>
       <p:cxnSp>
         <p:nvCxnSpPr>
-          <p:cNvPr id="29" name="Linie"/>
+          <p:cNvPr id="30" name="Linie"/>
           <p:cNvCxnSpPr/>
           <p:nvPr/>
         </p:nvCxnSpPr>
         <p:spPr>
           <a:xfrm>
-            <a:off x="2157029" y="569216"/>
+            <a:off x="2157029" y="787098"/>
             <a:ext cx="1715818" cy="0"/>
           </a:xfrm>
           <a:prstGeom prst="line">
@@ -4064,13 +4091,13 @@
       </p:cxnSp>
       <p:sp>
         <p:nvSpPr>
-          <p:cNvPr id="30" name="Text kopf-massnahmen"/>
+          <p:cNvPr id="31" name="Text kopf-massnahmen"/>
           <p:cNvSpPr txBox="1"/>
           <p:nvPr/>
         </p:nvSpPr>
         <p:spPr>
           <a:xfrm>
-            <a:off x="2157029" y="442082"/>
+            <a:off x="2157029" y="659964"/>
             <a:ext cx="1159880" cy="87153"/>
           </a:xfrm>
           <a:prstGeom prst="rect">
@@ -4099,13 +4126,13 @@
       </p:sp>
       <p:sp>
         <p:nvSpPr>
-          <p:cNvPr id="31" name="m-name-0"/>
+          <p:cNvPr id="32" name="m-name-0"/>
           <p:cNvSpPr/>
           <p:nvPr/>
         </p:nvSpPr>
         <p:spPr>
           <a:xfrm>
-            <a:off x="2159752" y="607345"/>
+            <a:off x="2159752" y="825227"/>
             <a:ext cx="1220138" cy="136176"/>
           </a:xfrm>
           <a:prstGeom prst="roundRect">
@@ -4132,13 +4159,13 @@
       </p:sp>
       <p:sp>
         <p:nvSpPr>
-          <p:cNvPr id="32" name="Text m-name-0"/>
+          <p:cNvPr id="33" name="Text m-name-0"/>
           <p:cNvSpPr txBox="1"/>
           <p:nvPr/>
         </p:nvSpPr>
         <p:spPr>
           <a:xfrm>
-            <a:off x="2200605" y="627281"/>
+            <a:off x="2200605" y="845163"/>
             <a:ext cx="1054428" cy="87153"/>
           </a:xfrm>
           <a:prstGeom prst="rect">
@@ -4167,13 +4194,13 @@
       </p:sp>
       <p:sp>
         <p:nvSpPr>
-          <p:cNvPr id="33" name="m-wert-0"/>
+          <p:cNvPr id="34" name="m-wert-0"/>
           <p:cNvSpPr/>
           <p:nvPr/>
         </p:nvSpPr>
         <p:spPr>
           <a:xfrm>
-            <a:off x="3428913" y="607345"/>
+            <a:off x="3428913" y="825227"/>
             <a:ext cx="441210" cy="136176"/>
           </a:xfrm>
           <a:prstGeom prst="roundRect">
@@ -4200,13 +4227,13 @@
       </p:sp>
       <p:sp>
         <p:nvSpPr>
-          <p:cNvPr id="34" name="Text m-wert-0"/>
+          <p:cNvPr id="35" name="Text m-wert-0"/>
           <p:cNvSpPr txBox="1"/>
           <p:nvPr/>
         </p:nvSpPr>
         <p:spPr>
           <a:xfrm>
-            <a:off x="3690542" y="627281"/>
+            <a:off x="3690542" y="845163"/>
             <a:ext cx="138729" cy="87153"/>
           </a:xfrm>
           <a:prstGeom prst="rect">
@@ -4235,13 +4262,13 @@
       </p:sp>
       <p:sp>
         <p:nvSpPr>
-          <p:cNvPr id="35" name="m-name-1"/>
+          <p:cNvPr id="36" name="m-name-1"/>
           <p:cNvSpPr/>
           <p:nvPr/>
         </p:nvSpPr>
         <p:spPr>
           <a:xfrm>
-            <a:off x="2159752" y="770757"/>
+            <a:off x="2159752" y="988638"/>
             <a:ext cx="1220138" cy="136176"/>
           </a:xfrm>
           <a:prstGeom prst="roundRect">
@@ -4268,13 +4295,13 @@
       </p:sp>
       <p:sp>
         <p:nvSpPr>
-          <p:cNvPr id="36" name="Text m-name-1"/>
+          <p:cNvPr id="37" name="Text m-name-1"/>
           <p:cNvSpPr txBox="1"/>
           <p:nvPr/>
         </p:nvSpPr>
         <p:spPr>
           <a:xfrm>
-            <a:off x="2200605" y="790693"/>
+            <a:off x="2200605" y="1008574"/>
             <a:ext cx="647517" cy="87153"/>
           </a:xfrm>
           <a:prstGeom prst="rect">
@@ -4303,13 +4330,13 @@
       </p:sp>
       <p:sp>
         <p:nvSpPr>
-          <p:cNvPr id="37" name="m-wert-1"/>
+          <p:cNvPr id="38" name="m-wert-1"/>
           <p:cNvSpPr/>
           <p:nvPr/>
         </p:nvSpPr>
         <p:spPr>
           <a:xfrm>
-            <a:off x="3428913" y="770757"/>
+            <a:off x="3428913" y="988638"/>
             <a:ext cx="441210" cy="136176"/>
           </a:xfrm>
           <a:prstGeom prst="roundRect">
@@ -4336,13 +4363,13 @@
       </p:sp>
       <p:sp>
         <p:nvSpPr>
-          <p:cNvPr id="38" name="Text m-wert-1"/>
+          <p:cNvPr id="39" name="Text m-wert-1"/>
           <p:cNvSpPr txBox="1"/>
           <p:nvPr/>
         </p:nvSpPr>
         <p:spPr>
           <a:xfrm>
-            <a:off x="3690542" y="790693"/>
+            <a:off x="3690542" y="1008574"/>
             <a:ext cx="138729" cy="87153"/>
           </a:xfrm>
           <a:prstGeom prst="rect">
@@ -4371,13 +4398,13 @@
       </p:sp>
       <p:sp>
         <p:nvSpPr>
-          <p:cNvPr id="39" name="m-name-2"/>
+          <p:cNvPr id="40" name="m-name-2"/>
           <p:cNvSpPr/>
           <p:nvPr/>
         </p:nvSpPr>
         <p:spPr>
           <a:xfrm>
-            <a:off x="2159752" y="934168"/>
+            <a:off x="2159752" y="1152050"/>
             <a:ext cx="1220138" cy="136176"/>
           </a:xfrm>
           <a:prstGeom prst="roundRect">
@@ -4404,13 +4431,13 @@
       </p:sp>
       <p:sp>
         <p:nvSpPr>
-          <p:cNvPr id="40" name="Text m-name-2"/>
+          <p:cNvPr id="41" name="Text m-name-2"/>
           <p:cNvSpPr txBox="1"/>
           <p:nvPr/>
         </p:nvSpPr>
         <p:spPr>
           <a:xfrm>
-            <a:off x="2200605" y="954104"/>
+            <a:off x="2200605" y="1171986"/>
             <a:ext cx="675689" cy="87153"/>
           </a:xfrm>
           <a:prstGeom prst="rect">
@@ -4439,13 +4466,13 @@
       </p:sp>
       <p:sp>
         <p:nvSpPr>
-          <p:cNvPr id="41" name="m-wert-2"/>
+          <p:cNvPr id="42" name="m-wert-2"/>
           <p:cNvSpPr/>
           <p:nvPr/>
         </p:nvSpPr>
         <p:spPr>
           <a:xfrm>
-            <a:off x="3428913" y="934168"/>
+            <a:off x="3428913" y="1152050"/>
             <a:ext cx="441210" cy="136176"/>
           </a:xfrm>
           <a:prstGeom prst="roundRect">
@@ -4472,13 +4499,13 @@
       </p:sp>
       <p:sp>
         <p:nvSpPr>
-          <p:cNvPr id="42" name="Text m-wert-2"/>
+          <p:cNvPr id="43" name="Text m-wert-2"/>
           <p:cNvSpPr txBox="1"/>
           <p:nvPr/>
         </p:nvSpPr>
         <p:spPr>
           <a:xfrm>
-            <a:off x="3690542" y="954104"/>
+            <a:off x="3690542" y="1171986"/>
             <a:ext cx="138729" cy="87153"/>
           </a:xfrm>
           <a:prstGeom prst="rect">
@@ -4507,13 +4534,13 @@
       </p:sp>
       <p:sp>
         <p:nvSpPr>
-          <p:cNvPr id="43" name="Text mk-label"/>
+          <p:cNvPr id="44" name="Text mk-label"/>
           <p:cNvSpPr txBox="1"/>
           <p:nvPr/>
         </p:nvSpPr>
         <p:spPr>
           <a:xfrm>
-            <a:off x="2637901" y="1117515"/>
+            <a:off x="2637901" y="1335397"/>
             <a:ext cx="744713" cy="87153"/>
           </a:xfrm>
           <a:prstGeom prst="rect">
@@ -4542,13 +4569,13 @@
       </p:sp>
       <p:sp>
         <p:nvSpPr>
-          <p:cNvPr id="44" name="f-mass-summe"/>
+          <p:cNvPr id="45" name="f-mass-summe"/>
           <p:cNvSpPr/>
           <p:nvPr/>
         </p:nvSpPr>
         <p:spPr>
           <a:xfrm>
-            <a:off x="3428913" y="1097579"/>
+            <a:off x="3428913" y="1315461"/>
             <a:ext cx="441210" cy="136176"/>
           </a:xfrm>
           <a:prstGeom prst="roundRect">
@@ -4575,13 +4602,13 @@
       </p:sp>
       <p:sp>
         <p:nvSpPr>
-          <p:cNvPr id="45" name="Text f-mass-summe"/>
+          <p:cNvPr id="46" name="Text f-mass-summe"/>
           <p:cNvSpPr txBox="1"/>
           <p:nvPr/>
         </p:nvSpPr>
         <p:spPr>
           <a:xfrm>
-            <a:off x="3690542" y="1117515"/>
+            <a:off x="3690542" y="1335397"/>
             <a:ext cx="138729" cy="87153"/>
           </a:xfrm>
           <a:prstGeom prst="rect">
@@ -4610,13 +4637,13 @@
       </p:sp>
       <p:sp>
         <p:nvSpPr>
-          <p:cNvPr id="46" name="Text l-neu"/>
+          <p:cNvPr id="47" name="Text l-neu"/>
           <p:cNvSpPr txBox="1"/>
           <p:nvPr/>
         </p:nvSpPr>
         <p:spPr>
           <a:xfrm>
-            <a:off x="2157029" y="1270032"/>
+            <a:off x="2157029" y="1487914"/>
             <a:ext cx="812716" cy="87153"/>
           </a:xfrm>
           <a:prstGeom prst="rect">
@@ -4645,13 +4672,13 @@
       </p:sp>
       <p:cxnSp>
         <p:nvCxnSpPr>
-          <p:cNvPr id="47" name="Linie"/>
+          <p:cNvPr id="48" name="Linie"/>
           <p:cNvCxnSpPr/>
           <p:nvPr/>
         </p:nvCxnSpPr>
         <p:spPr>
           <a:xfrm>
-            <a:off x="1985447" y="1819312"/>
+            <a:off x="1985447" y="2037194"/>
             <a:ext cx="0" cy="84429"/>
           </a:xfrm>
           <a:prstGeom prst="line">
@@ -4666,13 +4693,13 @@
       </p:cxnSp>
       <p:cxnSp>
         <p:nvCxnSpPr>
-          <p:cNvPr id="48" name="Linie"/>
+          <p:cNvPr id="49" name="Linie"/>
           <p:cNvCxnSpPr/>
           <p:nvPr/>
         </p:nvCxnSpPr>
         <p:spPr>
           <a:xfrm>
-            <a:off x="702669" y="1903741"/>
+            <a:off x="702669" y="2121623"/>
             <a:ext cx="2565557" cy="0"/>
           </a:xfrm>
           <a:prstGeom prst="line">
@@ -4687,14 +4714,14 @@
       </p:cxnSp>
       <p:cxnSp>
         <p:nvCxnSpPr>
-          <p:cNvPr id="49" name="Linie"/>
+          <p:cNvPr id="50" name="Linie"/>
           <p:cNvCxnSpPr/>
           <p:nvPr/>
         </p:nvCxnSpPr>
         <p:spPr>
           <a:xfrm>
-            <a:off x="705392" y="1903741"/>
-            <a:ext cx="0" cy="78983"/>
+            <a:off x="705392" y="2121623"/>
+            <a:ext cx="0" cy="78982"/>
           </a:xfrm>
           <a:prstGeom prst="line">
             <a:avLst/>
@@ -4708,14 +4735,14 @@
       </p:cxnSp>
       <p:cxnSp>
         <p:nvCxnSpPr>
-          <p:cNvPr id="50" name="Linie"/>
+          <p:cNvPr id="51" name="Linie"/>
           <p:cNvCxnSpPr/>
           <p:nvPr/>
         </p:nvCxnSpPr>
         <p:spPr>
           <a:xfrm>
-            <a:off x="1985447" y="1903741"/>
-            <a:ext cx="0" cy="78983"/>
+            <a:off x="1985447" y="2121623"/>
+            <a:ext cx="0" cy="78982"/>
           </a:xfrm>
           <a:prstGeom prst="line">
             <a:avLst/>
@@ -4729,14 +4756,14 @@
       </p:cxnSp>
       <p:cxnSp>
         <p:nvCxnSpPr>
-          <p:cNvPr id="51" name="Linie"/>
+          <p:cNvPr id="52" name="Linie"/>
           <p:cNvCxnSpPr/>
           <p:nvPr/>
         </p:nvCxnSpPr>
         <p:spPr>
           <a:xfrm>
-            <a:off x="3265502" y="1903741"/>
-            <a:ext cx="0" cy="78983"/>
+            <a:off x="3265502" y="2121623"/>
+            <a:ext cx="0" cy="78982"/>
           </a:xfrm>
           <a:prstGeom prst="line">
             <a:avLst/>
@@ -4750,13 +4777,13 @@
       </p:cxnSp>
       <p:sp>
         <p:nvSpPr>
-          <p:cNvPr id="52" name="k-holding"/>
+          <p:cNvPr id="53" name="k-holding"/>
           <p:cNvSpPr/>
           <p:nvPr/>
         </p:nvSpPr>
         <p:spPr>
           <a:xfrm>
-            <a:off x="1560578" y="1489766"/>
+            <a:off x="1560578" y="1707648"/>
             <a:ext cx="844292" cy="326823"/>
           </a:xfrm>
           <a:prstGeom prst="roundRect">
@@ -4783,13 +4810,13 @@
       </p:sp>
       <p:sp>
         <p:nvSpPr>
-          <p:cNvPr id="53" name="Text mk-label"/>
+          <p:cNvPr id="54" name="Text mk-label"/>
           <p:cNvSpPr txBox="1"/>
           <p:nvPr/>
         </p:nvSpPr>
         <p:spPr>
           <a:xfrm>
-            <a:off x="1595983" y="1520596"/>
+            <a:off x="1595983" y="1738478"/>
             <a:ext cx="316524" cy="87153"/>
           </a:xfrm>
           <a:prstGeom prst="rect">
@@ -4818,13 +4845,13 @@
       </p:sp>
       <p:sp>
         <p:nvSpPr>
-          <p:cNvPr id="54" name="f-holding"/>
+          <p:cNvPr id="55" name="f-holding"/>
           <p:cNvSpPr/>
           <p:nvPr/>
         </p:nvSpPr>
         <p:spPr>
           <a:xfrm>
-            <a:off x="1598707" y="1642283"/>
+            <a:off x="1598707" y="1860165"/>
             <a:ext cx="768033" cy="136176"/>
           </a:xfrm>
           <a:prstGeom prst="roundRect">
@@ -4851,13 +4878,13 @@
       </p:sp>
       <p:sp>
         <p:nvSpPr>
-          <p:cNvPr id="55" name="Text f-holding"/>
+          <p:cNvPr id="56" name="Text f-holding"/>
           <p:cNvSpPr txBox="1"/>
           <p:nvPr/>
         </p:nvSpPr>
         <p:spPr>
           <a:xfrm>
-            <a:off x="2108006" y="1662220"/>
+            <a:off x="2108006" y="1880101"/>
             <a:ext cx="217882" cy="87153"/>
           </a:xfrm>
           <a:prstGeom prst="rect">
@@ -4886,13 +4913,13 @@
       </p:sp>
       <p:sp>
         <p:nvSpPr>
-          <p:cNvPr id="56" name="k-vertrieb"/>
+          <p:cNvPr id="57" name="k-vertrieb"/>
           <p:cNvSpPr/>
           <p:nvPr/>
         </p:nvSpPr>
         <p:spPr>
           <a:xfrm>
-            <a:off x="280523" y="1985447"/>
+            <a:off x="280523" y="2203329"/>
             <a:ext cx="844292" cy="326823"/>
           </a:xfrm>
           <a:prstGeom prst="roundRect">
@@ -4919,13 +4946,13 @@
       </p:sp>
       <p:sp>
         <p:nvSpPr>
-          <p:cNvPr id="57" name="Text mk-label"/>
+          <p:cNvPr id="58" name="Text mk-label"/>
           <p:cNvSpPr txBox="1"/>
           <p:nvPr/>
         </p:nvSpPr>
         <p:spPr>
           <a:xfrm>
-            <a:off x="315928" y="2016277"/>
+            <a:off x="315928" y="2234159"/>
             <a:ext cx="609133" cy="87153"/>
           </a:xfrm>
           <a:prstGeom prst="rect">
@@ -4954,13 +4981,13 @@
       </p:sp>
       <p:sp>
         <p:nvSpPr>
-          <p:cNvPr id="58" name="g-vertrieb"/>
+          <p:cNvPr id="59" name="g-vertrieb"/>
           <p:cNvSpPr/>
           <p:nvPr/>
         </p:nvSpPr>
         <p:spPr>
           <a:xfrm>
-            <a:off x="318652" y="2137964"/>
+            <a:off x="318652" y="2355846"/>
             <a:ext cx="768033" cy="136176"/>
           </a:xfrm>
           <a:prstGeom prst="roundRect">
@@ -4987,13 +5014,13 @@
       </p:sp>
       <p:sp>
         <p:nvSpPr>
-          <p:cNvPr id="59" name="Text g-vertrieb"/>
+          <p:cNvPr id="60" name="Text g-vertrieb"/>
           <p:cNvSpPr txBox="1"/>
           <p:nvPr/>
         </p:nvSpPr>
         <p:spPr>
           <a:xfrm>
-            <a:off x="864718" y="2157900"/>
+            <a:off x="864718" y="2375782"/>
             <a:ext cx="181114" cy="87153"/>
           </a:xfrm>
           <a:prstGeom prst="rect">
@@ -5022,13 +5049,13 @@
       </p:sp>
       <p:sp>
         <p:nvSpPr>
-          <p:cNvPr id="60" name="k-produktion"/>
+          <p:cNvPr id="61" name="k-produktion"/>
           <p:cNvSpPr/>
           <p:nvPr/>
         </p:nvSpPr>
         <p:spPr>
           <a:xfrm>
-            <a:off x="1560578" y="1985447"/>
+            <a:off x="1560578" y="2203329"/>
             <a:ext cx="844292" cy="326823"/>
           </a:xfrm>
           <a:prstGeom prst="roundRect">
@@ -5055,13 +5082,13 @@
       </p:sp>
       <p:sp>
         <p:nvSpPr>
-          <p:cNvPr id="61" name="Text mk-label"/>
+          <p:cNvPr id="62" name="Text mk-label"/>
           <p:cNvSpPr txBox="1"/>
           <p:nvPr/>
         </p:nvSpPr>
         <p:spPr>
           <a:xfrm>
-            <a:off x="1595983" y="2016277"/>
+            <a:off x="1595983" y="2234159"/>
             <a:ext cx="727521" cy="87153"/>
           </a:xfrm>
           <a:prstGeom prst="rect">
@@ -5090,13 +5117,13 @@
       </p:sp>
       <p:sp>
         <p:nvSpPr>
-          <p:cNvPr id="62" name="g-produktion"/>
+          <p:cNvPr id="63" name="g-produktion"/>
           <p:cNvSpPr/>
           <p:nvPr/>
         </p:nvSpPr>
         <p:spPr>
           <a:xfrm>
-            <a:off x="1598707" y="2137964"/>
+            <a:off x="1598707" y="2355846"/>
             <a:ext cx="768033" cy="136176"/>
           </a:xfrm>
           <a:prstGeom prst="roundRect">
@@ -5123,13 +5150,13 @@
       </p:sp>
       <p:sp>
         <p:nvSpPr>
-          <p:cNvPr id="63" name="Text g-produktion"/>
+          <p:cNvPr id="64" name="Text g-produktion"/>
           <p:cNvSpPr txBox="1"/>
           <p:nvPr/>
         </p:nvSpPr>
         <p:spPr>
           <a:xfrm>
-            <a:off x="2144773" y="2157900"/>
+            <a:off x="2144773" y="2375782"/>
             <a:ext cx="181114" cy="87153"/>
           </a:xfrm>
           <a:prstGeom prst="rect">
@@ -5158,13 +5185,13 @@
       </p:sp>
       <p:sp>
         <p:nvSpPr>
-          <p:cNvPr id="64" name="k-neu"/>
+          <p:cNvPr id="65" name="k-neu"/>
           <p:cNvSpPr/>
           <p:nvPr/>
         </p:nvSpPr>
         <p:spPr>
           <a:xfrm>
-            <a:off x="2840633" y="1985447"/>
+            <a:off x="2840633" y="2203329"/>
             <a:ext cx="844292" cy="326823"/>
           </a:xfrm>
           <a:prstGeom prst="roundRect">
@@ -5191,13 +5218,13 @@
       </p:sp>
       <p:sp>
         <p:nvSpPr>
-          <p:cNvPr id="65" name="Text mk-label"/>
+          <p:cNvPr id="66" name="Text mk-label"/>
           <p:cNvSpPr txBox="1"/>
           <p:nvPr/>
         </p:nvSpPr>
         <p:spPr>
           <a:xfrm>
-            <a:off x="2876039" y="2016277"/>
+            <a:off x="2876039" y="2234159"/>
             <a:ext cx="426742" cy="87153"/>
           </a:xfrm>
           <a:prstGeom prst="rect">
@@ -5226,13 +5253,13 @@
       </p:sp>
       <p:sp>
         <p:nvSpPr>
-          <p:cNvPr id="66" name="g-neu"/>
+          <p:cNvPr id="67" name="g-neu"/>
           <p:cNvSpPr/>
           <p:nvPr/>
         </p:nvSpPr>
         <p:spPr>
           <a:xfrm>
-            <a:off x="2878762" y="2137964"/>
+            <a:off x="2878762" y="2355846"/>
             <a:ext cx="768033" cy="136176"/>
           </a:xfrm>
           <a:prstGeom prst="roundRect">
@@ -5259,13 +5286,13 @@
       </p:sp>
       <p:sp>
         <p:nvSpPr>
-          <p:cNvPr id="67" name="Text g-neu"/>
+          <p:cNvPr id="68" name="Text g-neu"/>
           <p:cNvSpPr txBox="1"/>
           <p:nvPr/>
         </p:nvSpPr>
         <p:spPr>
           <a:xfrm>
-            <a:off x="3467213" y="2157900"/>
+            <a:off x="3467213" y="2375782"/>
             <a:ext cx="138729" cy="87153"/>
           </a:xfrm>
           <a:prstGeom prst="rect">
@@ -5294,13 +5321,13 @@
       </p:sp>
       <p:sp>
         <p:nvSpPr>
-          <p:cNvPr id="68" name="band-ber"/>
+          <p:cNvPr id="69" name="band-ber"/>
           <p:cNvSpPr/>
           <p:nvPr/>
         </p:nvSpPr>
         <p:spPr>
           <a:xfrm>
-            <a:off x="87153" y="2413040"/>
+            <a:off x="87153" y="2630922"/>
             <a:ext cx="3785695" cy="141623"/>
           </a:xfrm>
           <a:prstGeom prst="rect">
@@ -5323,13 +5350,13 @@
       </p:sp>
       <p:sp>
         <p:nvSpPr>
-          <p:cNvPr id="69" name="Text band-ber"/>
+          <p:cNvPr id="70" name="Text band-ber"/>
           <p:cNvSpPr txBox="1"/>
           <p:nvPr/>
         </p:nvSpPr>
         <p:spPr>
           <a:xfrm>
-            <a:off x="130729" y="2435700"/>
+            <a:off x="130729" y="2653581"/>
             <a:ext cx="1385932" cy="87153"/>
           </a:xfrm>
           <a:prstGeom prst="rect">
@@ -5358,13 +5385,13 @@
       </p:sp>
       <p:cxnSp>
         <p:nvCxnSpPr>
-          <p:cNvPr id="70" name="Linie"/>
+          <p:cNvPr id="71" name="Linie"/>
           <p:cNvCxnSpPr/>
           <p:nvPr/>
         </p:nvCxnSpPr>
         <p:spPr>
           <a:xfrm>
-            <a:off x="1037662" y="3104814"/>
+            <a:off x="1037662" y="3322696"/>
             <a:ext cx="0" cy="84429"/>
           </a:xfrm>
           <a:prstGeom prst="line">
@@ -5379,13 +5406,13 @@
       </p:cxnSp>
       <p:cxnSp>
         <p:nvCxnSpPr>
-          <p:cNvPr id="71" name="Linie"/>
+          <p:cNvPr id="72" name="Linie"/>
           <p:cNvCxnSpPr/>
           <p:nvPr/>
         </p:nvCxnSpPr>
         <p:spPr>
           <a:xfrm>
-            <a:off x="561045" y="3189243"/>
+            <a:off x="561045" y="3407125"/>
             <a:ext cx="953233" cy="0"/>
           </a:xfrm>
           <a:prstGeom prst="line">
@@ -5400,14 +5427,14 @@
       </p:cxnSp>
       <p:cxnSp>
         <p:nvCxnSpPr>
-          <p:cNvPr id="72" name="Linie"/>
+          <p:cNvPr id="73" name="Linie"/>
           <p:cNvCxnSpPr/>
           <p:nvPr/>
         </p:nvCxnSpPr>
         <p:spPr>
           <a:xfrm>
-            <a:off x="563769" y="3189243"/>
-            <a:ext cx="0" cy="78983"/>
+            <a:off x="563769" y="3407125"/>
+            <a:ext cx="0" cy="78982"/>
           </a:xfrm>
           <a:prstGeom prst="line">
             <a:avLst/>
@@ -5421,14 +5448,14 @@
       </p:cxnSp>
       <p:cxnSp>
         <p:nvCxnSpPr>
-          <p:cNvPr id="73" name="Linie"/>
+          <p:cNvPr id="74" name="Linie"/>
           <p:cNvCxnSpPr/>
           <p:nvPr/>
         </p:nvCxnSpPr>
         <p:spPr>
           <a:xfrm>
-            <a:off x="1511554" y="3189243"/>
-            <a:ext cx="0" cy="78983"/>
+            <a:off x="1511554" y="3407125"/>
+            <a:ext cx="0" cy="78982"/>
           </a:xfrm>
           <a:prstGeom prst="line">
             <a:avLst/>
@@ -5442,13 +5469,13 @@
       </p:cxnSp>
       <p:cxnSp>
         <p:nvCxnSpPr>
-          <p:cNvPr id="74" name="Linie"/>
+          <p:cNvPr id="75" name="Linie"/>
           <p:cNvCxnSpPr/>
           <p:nvPr/>
         </p:nvCxnSpPr>
         <p:spPr>
           <a:xfrm>
-            <a:off x="2927785" y="3104814"/>
+            <a:off x="2927785" y="3322696"/>
             <a:ext cx="0" cy="84429"/>
           </a:xfrm>
           <a:prstGeom prst="line">
@@ -5463,13 +5490,13 @@
       </p:cxnSp>
       <p:cxnSp>
         <p:nvCxnSpPr>
-          <p:cNvPr id="75" name="Linie"/>
+          <p:cNvPr id="76" name="Linie"/>
           <p:cNvCxnSpPr/>
           <p:nvPr/>
         </p:nvCxnSpPr>
         <p:spPr>
           <a:xfrm>
-            <a:off x="2451169" y="3189243"/>
+            <a:off x="2451169" y="3407125"/>
             <a:ext cx="953233" cy="0"/>
           </a:xfrm>
           <a:prstGeom prst="line">
@@ -5484,14 +5511,14 @@
       </p:cxnSp>
       <p:cxnSp>
         <p:nvCxnSpPr>
-          <p:cNvPr id="76" name="Linie"/>
+          <p:cNvPr id="77" name="Linie"/>
           <p:cNvCxnSpPr/>
           <p:nvPr/>
         </p:nvCxnSpPr>
         <p:spPr>
           <a:xfrm>
-            <a:off x="2453893" y="3189243"/>
-            <a:ext cx="0" cy="78983"/>
+            <a:off x="2453893" y="3407125"/>
+            <a:ext cx="0" cy="78982"/>
           </a:xfrm>
           <a:prstGeom prst="line">
             <a:avLst/>
@@ -5505,14 +5532,14 @@
       </p:cxnSp>
       <p:cxnSp>
         <p:nvCxnSpPr>
-          <p:cNvPr id="77" name="Linie"/>
+          <p:cNvPr id="78" name="Linie"/>
           <p:cNvCxnSpPr/>
           <p:nvPr/>
         </p:nvCxnSpPr>
         <p:spPr>
           <a:xfrm>
-            <a:off x="3401678" y="3189243"/>
-            <a:ext cx="0" cy="78983"/>
+            <a:off x="3401678" y="3407125"/>
+            <a:ext cx="0" cy="78982"/>
           </a:xfrm>
           <a:prstGeom prst="line">
             <a:avLst/>
@@ -5526,13 +5553,13 @@
       </p:cxnSp>
       <p:sp>
         <p:nvSpPr>
-          <p:cNvPr id="78" name="k2-vertrieb"/>
+          <p:cNvPr id="79" name="k2-vertrieb"/>
           <p:cNvSpPr/>
           <p:nvPr/>
         </p:nvSpPr>
         <p:spPr>
           <a:xfrm>
-            <a:off x="612792" y="2611857"/>
+            <a:off x="612792" y="2829739"/>
             <a:ext cx="844292" cy="490234"/>
           </a:xfrm>
           <a:prstGeom prst="roundRect">
@@ -5559,13 +5586,13 @@
       </p:sp>
       <p:sp>
         <p:nvSpPr>
-          <p:cNvPr id="79" name="Text mk-label"/>
+          <p:cNvPr id="80" name="Text mk-label"/>
           <p:cNvSpPr txBox="1"/>
           <p:nvPr/>
         </p:nvSpPr>
         <p:spPr>
           <a:xfrm>
-            <a:off x="648198" y="2642687"/>
+            <a:off x="648198" y="2860569"/>
             <a:ext cx="609133" cy="87153"/>
           </a:xfrm>
           <a:prstGeom prst="rect">
@@ -5594,13 +5621,13 @@
       </p:sp>
       <p:sp>
         <p:nvSpPr>
-          <p:cNvPr id="80" name="Text mk-label"/>
+          <p:cNvPr id="81" name="Text mk-label"/>
           <p:cNvSpPr txBox="1"/>
           <p:nvPr/>
         </p:nvSpPr>
         <p:spPr>
           <a:xfrm>
-            <a:off x="648198" y="2784310"/>
+            <a:off x="648198" y="3002192"/>
             <a:ext cx="316865" cy="87153"/>
           </a:xfrm>
           <a:prstGeom prst="rect">
@@ -5629,13 +5656,13 @@
       </p:sp>
       <p:sp>
         <p:nvSpPr>
-          <p:cNvPr id="81" name="v-vertrieb"/>
+          <p:cNvPr id="82" name="v-vertrieb"/>
           <p:cNvSpPr/>
           <p:nvPr/>
         </p:nvSpPr>
         <p:spPr>
           <a:xfrm>
-            <a:off x="1021320" y="2764374"/>
+            <a:off x="1021320" y="2982256"/>
             <a:ext cx="397634" cy="136176"/>
           </a:xfrm>
           <a:prstGeom prst="roundRect">
@@ -5662,13 +5689,13 @@
       </p:sp>
       <p:sp>
         <p:nvSpPr>
-          <p:cNvPr id="82" name="Text v-vertrieb"/>
+          <p:cNvPr id="83" name="Text v-vertrieb"/>
           <p:cNvSpPr txBox="1"/>
           <p:nvPr/>
         </p:nvSpPr>
         <p:spPr>
           <a:xfrm>
-            <a:off x="1196988" y="2784310"/>
+            <a:off x="1196988" y="3002192"/>
             <a:ext cx="181114" cy="87153"/>
           </a:xfrm>
           <a:prstGeom prst="rect">
@@ -5697,13 +5724,13 @@
       </p:sp>
       <p:sp>
         <p:nvSpPr>
-          <p:cNvPr id="83" name="Text mk-label"/>
+          <p:cNvPr id="84" name="Text mk-label"/>
           <p:cNvSpPr txBox="1"/>
           <p:nvPr/>
         </p:nvSpPr>
         <p:spPr>
           <a:xfrm>
-            <a:off x="648198" y="2947722"/>
+            <a:off x="648198" y="3165603"/>
             <a:ext cx="336525" cy="87153"/>
           </a:xfrm>
           <a:prstGeom prst="rect">
@@ -5732,13 +5759,13 @@
       </p:sp>
       <p:sp>
         <p:nvSpPr>
-          <p:cNvPr id="84" name="d-vertrieb"/>
+          <p:cNvPr id="85" name="d-vertrieb"/>
           <p:cNvSpPr/>
           <p:nvPr/>
         </p:nvSpPr>
         <p:spPr>
           <a:xfrm>
-            <a:off x="1021320" y="2927785"/>
+            <a:off x="1021320" y="3145667"/>
             <a:ext cx="397634" cy="136176"/>
           </a:xfrm>
           <a:prstGeom prst="roundRect">
@@ -5765,13 +5792,13 @@
       </p:sp>
       <p:sp>
         <p:nvSpPr>
-          <p:cNvPr id="85" name="Text d-vertrieb"/>
+          <p:cNvPr id="86" name="Text d-vertrieb"/>
           <p:cNvSpPr txBox="1"/>
           <p:nvPr/>
         </p:nvSpPr>
         <p:spPr>
           <a:xfrm>
-            <a:off x="1197498" y="2947722"/>
+            <a:off x="1197498" y="3165603"/>
             <a:ext cx="180604" cy="87153"/>
           </a:xfrm>
           <a:prstGeom prst="rect">
@@ -5800,13 +5827,13 @@
       </p:sp>
       <p:sp>
         <p:nvSpPr>
-          <p:cNvPr id="86" name="k2-produktion"/>
+          <p:cNvPr id="87" name="k2-produktion"/>
           <p:cNvSpPr/>
           <p:nvPr/>
         </p:nvSpPr>
         <p:spPr>
           <a:xfrm>
-            <a:off x="2502916" y="2611857"/>
+            <a:off x="2502916" y="2829739"/>
             <a:ext cx="844292" cy="490234"/>
           </a:xfrm>
           <a:prstGeom prst="roundRect">
@@ -5833,13 +5860,13 @@
       </p:sp>
       <p:sp>
         <p:nvSpPr>
-          <p:cNvPr id="87" name="Text mk-label"/>
+          <p:cNvPr id="88" name="Text mk-label"/>
           <p:cNvSpPr txBox="1"/>
           <p:nvPr/>
         </p:nvSpPr>
         <p:spPr>
           <a:xfrm>
-            <a:off x="2538322" y="2642687"/>
+            <a:off x="2538322" y="2860569"/>
             <a:ext cx="727521" cy="87153"/>
           </a:xfrm>
           <a:prstGeom prst="rect">
@@ -5868,13 +5895,13 @@
       </p:sp>
       <p:sp>
         <p:nvSpPr>
-          <p:cNvPr id="88" name="Text mk-label"/>
+          <p:cNvPr id="89" name="Text mk-label"/>
           <p:cNvSpPr txBox="1"/>
           <p:nvPr/>
         </p:nvSpPr>
         <p:spPr>
           <a:xfrm>
-            <a:off x="2538322" y="2784310"/>
+            <a:off x="2538322" y="3002192"/>
             <a:ext cx="316865" cy="87153"/>
           </a:xfrm>
           <a:prstGeom prst="rect">
@@ -5903,13 +5930,13 @@
       </p:sp>
       <p:sp>
         <p:nvSpPr>
-          <p:cNvPr id="89" name="v-produktion"/>
+          <p:cNvPr id="90" name="v-produktion"/>
           <p:cNvSpPr/>
           <p:nvPr/>
         </p:nvSpPr>
         <p:spPr>
           <a:xfrm>
-            <a:off x="2911444" y="2764374"/>
+            <a:off x="2911444" y="2982256"/>
             <a:ext cx="397634" cy="136176"/>
           </a:xfrm>
           <a:prstGeom prst="roundRect">
@@ -5936,13 +5963,13 @@
       </p:sp>
       <p:sp>
         <p:nvSpPr>
-          <p:cNvPr id="90" name="Text v-produktion"/>
+          <p:cNvPr id="91" name="Text v-produktion"/>
           <p:cNvSpPr txBox="1"/>
           <p:nvPr/>
         </p:nvSpPr>
         <p:spPr>
           <a:xfrm>
-            <a:off x="3087111" y="2784310"/>
+            <a:off x="3087111" y="3002192"/>
             <a:ext cx="181114" cy="87153"/>
           </a:xfrm>
           <a:prstGeom prst="rect">
@@ -5971,13 +5998,13 @@
       </p:sp>
       <p:sp>
         <p:nvSpPr>
-          <p:cNvPr id="91" name="Text mk-label"/>
+          <p:cNvPr id="92" name="Text mk-label"/>
           <p:cNvSpPr txBox="1"/>
           <p:nvPr/>
         </p:nvSpPr>
         <p:spPr>
           <a:xfrm>
-            <a:off x="2538322" y="2947722"/>
+            <a:off x="2538322" y="3165603"/>
             <a:ext cx="336525" cy="87153"/>
           </a:xfrm>
           <a:prstGeom prst="rect">
@@ -6006,13 +6033,13 @@
       </p:sp>
       <p:sp>
         <p:nvSpPr>
-          <p:cNvPr id="92" name="d-produktion"/>
+          <p:cNvPr id="93" name="d-produktion"/>
           <p:cNvSpPr/>
           <p:nvPr/>
         </p:nvSpPr>
         <p:spPr>
           <a:xfrm>
-            <a:off x="2911444" y="2927785"/>
+            <a:off x="2911444" y="3145667"/>
             <a:ext cx="397634" cy="136176"/>
           </a:xfrm>
           <a:prstGeom prst="roundRect">
@@ -6039,13 +6066,13 @@
       </p:sp>
       <p:sp>
         <p:nvSpPr>
-          <p:cNvPr id="93" name="Text d-produktion"/>
+          <p:cNvPr id="94" name="Text d-produktion"/>
           <p:cNvSpPr txBox="1"/>
           <p:nvPr/>
         </p:nvSpPr>
         <p:spPr>
           <a:xfrm>
-            <a:off x="3087622" y="2947722"/>
+            <a:off x="3087622" y="3165603"/>
             <a:ext cx="180604" cy="87153"/>
           </a:xfrm>
           <a:prstGeom prst="rect">
@@ -6074,13 +6101,13 @@
       </p:sp>
       <p:sp>
         <p:nvSpPr>
-          <p:cNvPr id="94" name="k-grosskunden"/>
+          <p:cNvPr id="95" name="k-grosskunden"/>
           <p:cNvSpPr/>
           <p:nvPr/>
         </p:nvSpPr>
         <p:spPr>
           <a:xfrm>
-            <a:off x="138900" y="3270949"/>
+            <a:off x="138900" y="3488831"/>
             <a:ext cx="844292" cy="326823"/>
           </a:xfrm>
           <a:prstGeom prst="roundRect">
@@ -6107,13 +6134,13 @@
       </p:sp>
       <p:sp>
         <p:nvSpPr>
-          <p:cNvPr id="95" name="Text mk-label"/>
+          <p:cNvPr id="96" name="Text mk-label"/>
           <p:cNvSpPr txBox="1"/>
           <p:nvPr/>
         </p:nvSpPr>
         <p:spPr>
           <a:xfrm>
-            <a:off x="174305" y="3301779"/>
+            <a:off x="174305" y="3519661"/>
             <a:ext cx="486063" cy="87153"/>
           </a:xfrm>
           <a:prstGeom prst="rect">
@@ -6142,13 +6169,13 @@
       </p:sp>
       <p:sp>
         <p:nvSpPr>
-          <p:cNvPr id="96" name="b-grosskunden"/>
+          <p:cNvPr id="97" name="b-grosskunden"/>
           <p:cNvSpPr/>
           <p:nvPr/>
         </p:nvSpPr>
         <p:spPr>
           <a:xfrm>
-            <a:off x="177029" y="3423466"/>
+            <a:off x="177029" y="3641348"/>
             <a:ext cx="768033" cy="136176"/>
           </a:xfrm>
           <a:prstGeom prst="roundRect">
@@ -6175,13 +6202,13 @@
       </p:sp>
       <p:sp>
         <p:nvSpPr>
-          <p:cNvPr id="97" name="Text b-grosskunden"/>
+          <p:cNvPr id="98" name="Text b-grosskunden"/>
           <p:cNvSpPr txBox="1"/>
           <p:nvPr/>
         </p:nvSpPr>
         <p:spPr>
           <a:xfrm>
-            <a:off x="723095" y="3443402"/>
+            <a:off x="723095" y="3661284"/>
             <a:ext cx="181114" cy="87153"/>
           </a:xfrm>
           <a:prstGeom prst="rect">
@@ -6210,13 +6237,13 @@
       </p:sp>
       <p:sp>
         <p:nvSpPr>
-          <p:cNvPr id="98" name="k-massen"/>
+          <p:cNvPr id="99" name="k-massen"/>
           <p:cNvSpPr/>
           <p:nvPr/>
         </p:nvSpPr>
         <p:spPr>
           <a:xfrm>
-            <a:off x="1086685" y="3270949"/>
+            <a:off x="1086685" y="3488831"/>
             <a:ext cx="844292" cy="326823"/>
           </a:xfrm>
           <a:prstGeom prst="roundRect">
@@ -6243,13 +6270,13 @@
       </p:sp>
       <p:sp>
         <p:nvSpPr>
-          <p:cNvPr id="99" name="Text mk-label"/>
+          <p:cNvPr id="100" name="Text mk-label"/>
           <p:cNvSpPr txBox="1"/>
           <p:nvPr/>
         </p:nvSpPr>
         <p:spPr>
           <a:xfrm>
-            <a:off x="1122091" y="3301779"/>
+            <a:off x="1122091" y="3519661"/>
             <a:ext cx="626069" cy="87153"/>
           </a:xfrm>
           <a:prstGeom prst="rect">
@@ -6278,13 +6305,13 @@
       </p:sp>
       <p:sp>
         <p:nvSpPr>
-          <p:cNvPr id="100" name="b-massen"/>
+          <p:cNvPr id="101" name="b-massen"/>
           <p:cNvSpPr/>
           <p:nvPr/>
         </p:nvSpPr>
         <p:spPr>
           <a:xfrm>
-            <a:off x="1124814" y="3423466"/>
+            <a:off x="1124814" y="3641348"/>
             <a:ext cx="768033" cy="136176"/>
           </a:xfrm>
           <a:prstGeom prst="roundRect">
@@ -6311,13 +6338,13 @@
       </p:sp>
       <p:sp>
         <p:nvSpPr>
-          <p:cNvPr id="101" name="Text b-massen"/>
+          <p:cNvPr id="102" name="Text b-massen"/>
           <p:cNvSpPr txBox="1"/>
           <p:nvPr/>
         </p:nvSpPr>
         <p:spPr>
           <a:xfrm>
-            <a:off x="1670880" y="3443402"/>
+            <a:off x="1670880" y="3661284"/>
             <a:ext cx="181114" cy="87153"/>
           </a:xfrm>
           <a:prstGeom prst="rect">
@@ -6346,13 +6373,13 @@
       </p:sp>
       <p:sp>
         <p:nvSpPr>
-          <p:cNvPr id="102" name="k-winter"/>
+          <p:cNvPr id="103" name="k-winter"/>
           <p:cNvSpPr/>
           <p:nvPr/>
         </p:nvSpPr>
         <p:spPr>
           <a:xfrm>
-            <a:off x="2029023" y="3270949"/>
+            <a:off x="2029023" y="3488831"/>
             <a:ext cx="844292" cy="326823"/>
           </a:xfrm>
           <a:prstGeom prst="roundRect">
@@ -6379,13 +6406,13 @@
       </p:sp>
       <p:sp>
         <p:nvSpPr>
-          <p:cNvPr id="103" name="Text mk-label"/>
+          <p:cNvPr id="104" name="Text mk-label"/>
           <p:cNvSpPr txBox="1"/>
           <p:nvPr/>
         </p:nvSpPr>
         <p:spPr>
           <a:xfrm>
-            <a:off x="2064429" y="3301779"/>
+            <a:off x="2064429" y="3519661"/>
             <a:ext cx="459935" cy="87153"/>
           </a:xfrm>
           <a:prstGeom prst="rect">
@@ -6414,13 +6441,13 @@
       </p:sp>
       <p:sp>
         <p:nvSpPr>
-          <p:cNvPr id="104" name="b-winter"/>
+          <p:cNvPr id="105" name="b-winter"/>
           <p:cNvSpPr/>
           <p:nvPr/>
         </p:nvSpPr>
         <p:spPr>
           <a:xfrm>
-            <a:off x="2067153" y="3423466"/>
+            <a:off x="2067153" y="3641348"/>
             <a:ext cx="768033" cy="136176"/>
           </a:xfrm>
           <a:prstGeom prst="roundRect">
@@ -6447,13 +6474,13 @@
       </p:sp>
       <p:sp>
         <p:nvSpPr>
-          <p:cNvPr id="105" name="Text b-winter"/>
+          <p:cNvPr id="106" name="Text b-winter"/>
           <p:cNvSpPr txBox="1"/>
           <p:nvPr/>
         </p:nvSpPr>
         <p:spPr>
           <a:xfrm>
-            <a:off x="2613219" y="3443402"/>
+            <a:off x="2613219" y="3661284"/>
             <a:ext cx="181114" cy="87153"/>
           </a:xfrm>
           <a:prstGeom prst="rect">
@@ -6482,13 +6509,13 @@
       </p:sp>
       <p:sp>
         <p:nvSpPr>
-          <p:cNvPr id="106" name="k-sommer"/>
+          <p:cNvPr id="107" name="k-sommer"/>
           <p:cNvSpPr/>
           <p:nvPr/>
         </p:nvSpPr>
         <p:spPr>
           <a:xfrm>
-            <a:off x="2976809" y="3270949"/>
+            <a:off x="2976809" y="3488831"/>
             <a:ext cx="844292" cy="326823"/>
           </a:xfrm>
           <a:prstGeom prst="roundRect">
@@ -6515,13 +6542,13 @@
       </p:sp>
       <p:sp>
         <p:nvSpPr>
-          <p:cNvPr id="107" name="Text mk-label"/>
+          <p:cNvPr id="108" name="Text mk-label"/>
           <p:cNvSpPr txBox="1"/>
           <p:nvPr/>
         </p:nvSpPr>
         <p:spPr>
           <a:xfrm>
-            <a:off x="3012215" y="3301779"/>
+            <a:off x="3012215" y="3519661"/>
             <a:ext cx="528533" cy="87153"/>
           </a:xfrm>
           <a:prstGeom prst="rect">
@@ -6550,13 +6577,13 @@
       </p:sp>
       <p:sp>
         <p:nvSpPr>
-          <p:cNvPr id="108" name="b-sommer"/>
+          <p:cNvPr id="109" name="b-sommer"/>
           <p:cNvSpPr/>
           <p:nvPr/>
         </p:nvSpPr>
         <p:spPr>
           <a:xfrm>
-            <a:off x="3014938" y="3423466"/>
+            <a:off x="3014938" y="3641348"/>
             <a:ext cx="768033" cy="136176"/>
           </a:xfrm>
           <a:prstGeom prst="roundRect">
@@ -6583,13 +6610,13 @@
       </p:sp>
       <p:sp>
         <p:nvSpPr>
-          <p:cNvPr id="109" name="Text b-sommer"/>
+          <p:cNvPr id="110" name="Text b-sommer"/>
           <p:cNvSpPr txBox="1"/>
           <p:nvPr/>
         </p:nvSpPr>
         <p:spPr>
           <a:xfrm>
-            <a:off x="3561004" y="3443402"/>
+            <a:off x="3561004" y="3661284"/>
             <a:ext cx="181114" cy="87153"/>
           </a:xfrm>
           <a:prstGeom prst="rect">
